--- a/materials/pdf/original/DS05_Folien_Weniger-ist-mehr.pptx
+++ b/materials/pdf/original/DS05_Folien_Weniger-ist-mehr.pptx
@@ -126,12 +126,12 @@
   <p:extLst>
     <p:ext uri="{521415D9-36F7-43E2-AB2F-B90AF26B5E84}">
       <p14:sectionLst xmlns:p14="http://schemas.microsoft.com/office/powerpoint/2010/main">
-        <p14:section name="Start" id="{e923effe-a522-b9f6-32b7-f6e5acfa4fa0}">
+        <p14:section name="Start" id="{e78e07fa-7f28-9cc8-12b8-50dac6cb4b69}">
           <p14:sldIdLst>
             <p14:sldId id="256"/>
           </p14:sldIdLst>
         </p14:section>
-        <p14:section name="Einstieg" id="{e418f3f7-6746-4127-980b-9530449756f3}">
+        <p14:section name="Einstieg" id="{f6b50b33-c777-df15-f9b4-c0911bbcfcf4}">
           <p14:sldIdLst>
             <p14:sldId id="257"/>
             <p14:sldId id="258"/>
@@ -139,7 +139,7 @@
             <p14:sldId id="260"/>
           </p14:sldIdLst>
         </p14:section>
-        <p14:section name="Erarbeitung" id="{81a6b923-cd85-303c-02aa-9cb406ce854a}">
+        <p14:section name="Erarbeitung" id="{68319f62-71e1-b687-e10d-444bf8b57194}">
           <p14:sldIdLst>
             <p14:sldId id="261"/>
             <p14:sldId id="262"/>
@@ -152,20 +152,20 @@
             <p14:sldId id="269"/>
           </p14:sldIdLst>
         </p14:section>
-        <p14:section name="Übung" id="{cad74b8b-e0df-de56-fad4-03424ae6f4cc}">
+        <p14:section name="Übung" id="{02a0c232-490f-6489-b46b-ebe31f12ec4f}">
           <p14:sldIdLst>
             <p14:sldId id="270"/>
             <p14:sldId id="271"/>
             <p14:sldId id="272"/>
           </p14:sldIdLst>
         </p14:section>
-        <p14:section name="Sicherung" id="{c96f98a4-4191-ecc9-903c-ac86330266e6}">
+        <p14:section name="Sicherung" id="{9eca6822-8621-af4b-6079-70dcc6fb9034}">
           <p14:sldIdLst>
             <p14:sldId id="273"/>
             <p14:sldId id="274"/>
           </p14:sldIdLst>
         </p14:section>
-        <p14:section name="Abschluss" id="{1e149d48-d5e6-a301-8835-29a095a7f2d8}">
+        <p14:section name="Abschluss" id="{f2401868-e6e3-f5c6-f1ed-d272f89425b8}">
           <p14:sldIdLst>
             <p14:sldId id="275"/>
           </p14:sldIdLst>
@@ -2573,6 +2573,45 @@
       </p:sp>
       <p:sp>
         <p:nvSpPr>
+          <p:cNvPr id="4" name="Text 1"/>
+          <p:cNvSpPr/>
+          <p:nvPr/>
+        </p:nvSpPr>
+        <p:spPr>
+          <a:xfrm>
+            <a:off x="7985455" y="6473952"/>
+            <a:ext cx="2926080" cy="274320"/>
+          </a:xfrm>
+          <a:prstGeom prst="rect">
+            <a:avLst/>
+          </a:prstGeom>
+          <a:noFill/>
+          <a:ln/>
+        </p:spPr>
+        <p:txBody>
+          <a:bodyPr wrap="square" lIns="0" tIns="0" rIns="0" bIns="0" rtlCol="0" anchor="ctr"/>
+          <a:lstStyle/>
+          <a:p>
+            <a:pPr algn="r" indent="0" marL="0">
+              <a:buNone/>
+            </a:pPr>
+            <a:r>
+              <a:rPr lang="en-US" sz="1100" dirty="0">
+                <a:solidFill>
+                  <a:srgbClr val="5B6770"/>
+                </a:solidFill>
+                <a:latin typeface="Calibri" pitchFamily="34" charset="0"/>
+                <a:ea typeface="Calibri" pitchFamily="34" charset="-122"/>
+                <a:cs typeface="Calibri" pitchFamily="34" charset="-120"/>
+              </a:rPr>
+              <a:t>CC BY-SA 4.0 · Frank Juchim</a:t>
+            </a:r>
+            <a:endParaRPr lang="en-US" sz="1100" dirty="0"/>
+          </a:p>
+        </p:txBody>
+      </p:sp>
+      <p:sp>
+        <p:nvSpPr>
           <p:cNvPr id="25" name="Slide Number Placeholder 0"/>
           <p:cNvSpPr>
             <a:spLocks noGrp="1"/>
@@ -2724,6 +2763,45 @@
                 <a:cs typeface="Calibri" pitchFamily="34" charset="-120"/>
               </a:rPr>
               <a:t>Level 5 · Welt A · Endliche Automaten · Zusatz (über das KC hinaus)</a:t>
+            </a:r>
+            <a:endParaRPr lang="en-US" sz="1100" dirty="0"/>
+          </a:p>
+        </p:txBody>
+      </p:sp>
+      <p:sp>
+        <p:nvSpPr>
+          <p:cNvPr id="4" name="Text 1"/>
+          <p:cNvSpPr/>
+          <p:nvPr/>
+        </p:nvSpPr>
+        <p:spPr>
+          <a:xfrm>
+            <a:off x="7985455" y="6473952"/>
+            <a:ext cx="2926080" cy="274320"/>
+          </a:xfrm>
+          <a:prstGeom prst="rect">
+            <a:avLst/>
+          </a:prstGeom>
+          <a:noFill/>
+          <a:ln/>
+        </p:spPr>
+        <p:txBody>
+          <a:bodyPr wrap="square" lIns="0" tIns="0" rIns="0" bIns="0" rtlCol="0" anchor="ctr"/>
+          <a:lstStyle/>
+          <a:p>
+            <a:pPr algn="r" indent="0" marL="0">
+              <a:buNone/>
+            </a:pPr>
+            <a:r>
+              <a:rPr lang="en-US" sz="1100" dirty="0">
+                <a:solidFill>
+                  <a:srgbClr val="5B6770"/>
+                </a:solidFill>
+                <a:latin typeface="Calibri" pitchFamily="34" charset="0"/>
+                <a:ea typeface="Calibri" pitchFamily="34" charset="-122"/>
+                <a:cs typeface="Calibri" pitchFamily="34" charset="-120"/>
+              </a:rPr>
+              <a:t>CC BY-SA 4.0 · Frank Juchim</a:t>
             </a:r>
             <a:endParaRPr lang="en-US" sz="1100" dirty="0"/>
           </a:p>
